--- a/presentations/news_model_findings.pptx
+++ b/presentations/news_model_findings.pptx
@@ -6899,7 +6899,7 @@
               </a:defRPr>
             </a:pPr>
             <a:r>
-              <a:t>Detail: FINDINGS.md · tries.md · train_news_model_extended_inlined.ipynb</a:t>
+              <a:t>Detail: FINDINGS.md · tries.md · train_news_model.ipynb</a:t>
             </a:r>
           </a:p>
         </p:txBody>
